--- a/assets/fbd.pptx
+++ b/assets/fbd.pptx
@@ -6,7 +6,8 @@
   </p:sldMasterIdLst>
   <p:sldIdLst>
     <p:sldId id="256" r:id="rId2"/>
-    <p:sldId id="257" r:id="rId3"/>
+    <p:sldId id="258" r:id="rId3"/>
+    <p:sldId id="257" r:id="rId4"/>
   </p:sldIdLst>
   <p:sldSz cx="12192000" cy="6858000"/>
   <p:notesSz cx="6858000" cy="9144000"/>
@@ -105,6 +106,11 @@
       </a:defRPr>
     </a:lvl9pPr>
   </p:defaultTextStyle>
+  <p:extLst>
+    <p:ext uri="{EFAFB233-063F-42B5-8137-9DF3F51BA10A}">
+      <p15:sldGuideLst xmlns:p15="http://schemas.microsoft.com/office/powerpoint/2012/main"/>
+    </p:ext>
+  </p:extLst>
 </p:presentation>
 </file>
 
@@ -255,7 +261,7 @@
           <a:p>
             <a:fld id="{80E38BE0-8594-49DC-8943-58E425E33D0C}" type="datetimeFigureOut">
               <a:rPr lang="en-US" smtClean="0"/>
-              <a:t>4/19/2026</a:t>
+              <a:t>4/20/2026</a:t>
             </a:fld>
             <a:endParaRPr lang="en-US"/>
           </a:p>
@@ -453,7 +459,7 @@
           <a:p>
             <a:fld id="{80E38BE0-8594-49DC-8943-58E425E33D0C}" type="datetimeFigureOut">
               <a:rPr lang="en-US" smtClean="0"/>
-              <a:t>4/19/2026</a:t>
+              <a:t>4/20/2026</a:t>
             </a:fld>
             <a:endParaRPr lang="en-US"/>
           </a:p>
@@ -661,7 +667,7 @@
           <a:p>
             <a:fld id="{80E38BE0-8594-49DC-8943-58E425E33D0C}" type="datetimeFigureOut">
               <a:rPr lang="en-US" smtClean="0"/>
-              <a:t>4/19/2026</a:t>
+              <a:t>4/20/2026</a:t>
             </a:fld>
             <a:endParaRPr lang="en-US"/>
           </a:p>
@@ -859,7 +865,7 @@
           <a:p>
             <a:fld id="{80E38BE0-8594-49DC-8943-58E425E33D0C}" type="datetimeFigureOut">
               <a:rPr lang="en-US" smtClean="0"/>
-              <a:t>4/19/2026</a:t>
+              <a:t>4/20/2026</a:t>
             </a:fld>
             <a:endParaRPr lang="en-US"/>
           </a:p>
@@ -1134,7 +1140,7 @@
           <a:p>
             <a:fld id="{80E38BE0-8594-49DC-8943-58E425E33D0C}" type="datetimeFigureOut">
               <a:rPr lang="en-US" smtClean="0"/>
-              <a:t>4/19/2026</a:t>
+              <a:t>4/20/2026</a:t>
             </a:fld>
             <a:endParaRPr lang="en-US"/>
           </a:p>
@@ -1399,7 +1405,7 @@
           <a:p>
             <a:fld id="{80E38BE0-8594-49DC-8943-58E425E33D0C}" type="datetimeFigureOut">
               <a:rPr lang="en-US" smtClean="0"/>
-              <a:t>4/19/2026</a:t>
+              <a:t>4/20/2026</a:t>
             </a:fld>
             <a:endParaRPr lang="en-US"/>
           </a:p>
@@ -1811,7 +1817,7 @@
           <a:p>
             <a:fld id="{80E38BE0-8594-49DC-8943-58E425E33D0C}" type="datetimeFigureOut">
               <a:rPr lang="en-US" smtClean="0"/>
-              <a:t>4/19/2026</a:t>
+              <a:t>4/20/2026</a:t>
             </a:fld>
             <a:endParaRPr lang="en-US"/>
           </a:p>
@@ -1952,7 +1958,7 @@
           <a:p>
             <a:fld id="{80E38BE0-8594-49DC-8943-58E425E33D0C}" type="datetimeFigureOut">
               <a:rPr lang="en-US" smtClean="0"/>
-              <a:t>4/19/2026</a:t>
+              <a:t>4/20/2026</a:t>
             </a:fld>
             <a:endParaRPr lang="en-US"/>
           </a:p>
@@ -2065,7 +2071,7 @@
           <a:p>
             <a:fld id="{80E38BE0-8594-49DC-8943-58E425E33D0C}" type="datetimeFigureOut">
               <a:rPr lang="en-US" smtClean="0"/>
-              <a:t>4/19/2026</a:t>
+              <a:t>4/20/2026</a:t>
             </a:fld>
             <a:endParaRPr lang="en-US"/>
           </a:p>
@@ -2376,7 +2382,7 @@
           <a:p>
             <a:fld id="{80E38BE0-8594-49DC-8943-58E425E33D0C}" type="datetimeFigureOut">
               <a:rPr lang="en-US" smtClean="0"/>
-              <a:t>4/19/2026</a:t>
+              <a:t>4/20/2026</a:t>
             </a:fld>
             <a:endParaRPr lang="en-US"/>
           </a:p>
@@ -2664,7 +2670,7 @@
           <a:p>
             <a:fld id="{80E38BE0-8594-49DC-8943-58E425E33D0C}" type="datetimeFigureOut">
               <a:rPr lang="en-US" smtClean="0"/>
-              <a:t>4/19/2026</a:t>
+              <a:t>4/20/2026</a:t>
             </a:fld>
             <a:endParaRPr lang="en-US"/>
           </a:p>
@@ -2905,7 +2911,7 @@
           <a:p>
             <a:fld id="{80E38BE0-8594-49DC-8943-58E425E33D0C}" type="datetimeFigureOut">
               <a:rPr lang="en-US" smtClean="0"/>
-              <a:t>4/19/2026</a:t>
+              <a:t>4/20/2026</a:t>
             </a:fld>
             <a:endParaRPr lang="en-US"/>
           </a:p>
@@ -4116,6 +4122,843 @@
 </file>
 
 <file path=ppt/slides/slide2.xml><?xml version="1.0" encoding="utf-8"?>
+<p:sld xmlns:a="http://schemas.openxmlformats.org/drawingml/2006/main" xmlns:r="http://schemas.openxmlformats.org/officeDocument/2006/relationships" xmlns:p="http://schemas.openxmlformats.org/presentationml/2006/main">
+  <p:cSld>
+    <p:spTree>
+      <p:nvGrpSpPr>
+        <p:cNvPr id="1" name="">
+          <a:extLst>
+            <a:ext uri="{FF2B5EF4-FFF2-40B4-BE49-F238E27FC236}">
+              <a16:creationId xmlns:a16="http://schemas.microsoft.com/office/drawing/2014/main" id="{0A26F4F6-B673-7A56-1D2D-DC1DD3575253}"/>
+            </a:ext>
+          </a:extLst>
+        </p:cNvPr>
+        <p:cNvGrpSpPr/>
+        <p:nvPr/>
+      </p:nvGrpSpPr>
+      <p:grpSpPr>
+        <a:xfrm>
+          <a:off x="0" y="0"/>
+          <a:ext cx="0" cy="0"/>
+          <a:chOff x="0" y="0"/>
+          <a:chExt cx="0" cy="0"/>
+        </a:xfrm>
+      </p:grpSpPr>
+      <p:sp>
+        <p:nvSpPr>
+          <p:cNvPr id="6" name="Rectangle 5">
+            <a:extLst>
+              <a:ext uri="{FF2B5EF4-FFF2-40B4-BE49-F238E27FC236}">
+                <a16:creationId xmlns:a16="http://schemas.microsoft.com/office/drawing/2014/main" id="{A0D9D7C1-9E93-C78C-172E-02265BC3402B}"/>
+              </a:ext>
+            </a:extLst>
+          </p:cNvPr>
+          <p:cNvSpPr/>
+          <p:nvPr/>
+        </p:nvSpPr>
+        <p:spPr>
+          <a:xfrm>
+            <a:off x="3563656" y="2397155"/>
+            <a:ext cx="272883" cy="2063690"/>
+          </a:xfrm>
+          <a:prstGeom prst="rect">
+            <a:avLst/>
+          </a:prstGeom>
+          <a:pattFill prst="wdDnDiag">
+            <a:fgClr>
+              <a:schemeClr val="accent1"/>
+            </a:fgClr>
+            <a:bgClr>
+              <a:schemeClr val="bg1"/>
+            </a:bgClr>
+          </a:pattFill>
+          <a:ln>
+            <a:noFill/>
+          </a:ln>
+        </p:spPr>
+        <p:style>
+          <a:lnRef idx="2">
+            <a:schemeClr val="accent1">
+              <a:shade val="15000"/>
+            </a:schemeClr>
+          </a:lnRef>
+          <a:fillRef idx="1">
+            <a:schemeClr val="accent1"/>
+          </a:fillRef>
+          <a:effectRef idx="0">
+            <a:schemeClr val="accent1"/>
+          </a:effectRef>
+          <a:fontRef idx="minor">
+            <a:schemeClr val="lt1"/>
+          </a:fontRef>
+        </p:style>
+        <p:txBody>
+          <a:bodyPr rtlCol="0" anchor="ctr"/>
+          <a:lstStyle/>
+          <a:p>
+            <a:pPr algn="ctr"/>
+            <a:endParaRPr lang="en-US"/>
+          </a:p>
+        </p:txBody>
+      </p:sp>
+      <p:cxnSp>
+        <p:nvCxnSpPr>
+          <p:cNvPr id="5" name="Straight Connector 4">
+            <a:extLst>
+              <a:ext uri="{FF2B5EF4-FFF2-40B4-BE49-F238E27FC236}">
+                <a16:creationId xmlns:a16="http://schemas.microsoft.com/office/drawing/2014/main" id="{EE06DE44-2F28-ACBC-37BE-4458369EFE9A}"/>
+              </a:ext>
+            </a:extLst>
+          </p:cNvPr>
+          <p:cNvCxnSpPr>
+            <a:cxnSpLocks/>
+          </p:cNvCxnSpPr>
+          <p:nvPr/>
+        </p:nvCxnSpPr>
+        <p:spPr>
+          <a:xfrm>
+            <a:off x="3836540" y="2397155"/>
+            <a:ext cx="0" cy="2063691"/>
+          </a:xfrm>
+          <a:prstGeom prst="line">
+            <a:avLst/>
+          </a:prstGeom>
+        </p:spPr>
+        <p:style>
+          <a:lnRef idx="2">
+            <a:schemeClr val="accent1"/>
+          </a:lnRef>
+          <a:fillRef idx="0">
+            <a:schemeClr val="accent1"/>
+          </a:fillRef>
+          <a:effectRef idx="1">
+            <a:schemeClr val="accent1"/>
+          </a:effectRef>
+          <a:fontRef idx="minor">
+            <a:schemeClr val="tx1"/>
+          </a:fontRef>
+        </p:style>
+      </p:cxnSp>
+      <p:sp>
+        <p:nvSpPr>
+          <p:cNvPr id="7" name="Rectangle 6">
+            <a:extLst>
+              <a:ext uri="{FF2B5EF4-FFF2-40B4-BE49-F238E27FC236}">
+                <a16:creationId xmlns:a16="http://schemas.microsoft.com/office/drawing/2014/main" id="{1FEDB22E-9AF1-AA91-DFF5-18D261F55AEE}"/>
+              </a:ext>
+            </a:extLst>
+          </p:cNvPr>
+          <p:cNvSpPr/>
+          <p:nvPr/>
+        </p:nvSpPr>
+        <p:spPr>
+          <a:xfrm>
+            <a:off x="3836539" y="3319097"/>
+            <a:ext cx="4791806" cy="219807"/>
+          </a:xfrm>
+          <a:prstGeom prst="rect">
+            <a:avLst/>
+          </a:prstGeom>
+          <a:solidFill>
+            <a:schemeClr val="accent1">
+              <a:lumMod val="20000"/>
+              <a:lumOff val="80000"/>
+            </a:schemeClr>
+          </a:solidFill>
+        </p:spPr>
+        <p:style>
+          <a:lnRef idx="2">
+            <a:schemeClr val="accent1">
+              <a:shade val="15000"/>
+            </a:schemeClr>
+          </a:lnRef>
+          <a:fillRef idx="1">
+            <a:schemeClr val="accent1"/>
+          </a:fillRef>
+          <a:effectRef idx="0">
+            <a:schemeClr val="accent1"/>
+          </a:effectRef>
+          <a:fontRef idx="minor">
+            <a:schemeClr val="lt1"/>
+          </a:fontRef>
+        </p:style>
+        <p:txBody>
+          <a:bodyPr rtlCol="0" anchor="ctr"/>
+          <a:lstStyle/>
+          <a:p>
+            <a:pPr algn="ctr"/>
+            <a:endParaRPr lang="en-US"/>
+          </a:p>
+        </p:txBody>
+      </p:sp>
+      <p:cxnSp>
+        <p:nvCxnSpPr>
+          <p:cNvPr id="10" name="Straight Arrow Connector 9">
+            <a:extLst>
+              <a:ext uri="{FF2B5EF4-FFF2-40B4-BE49-F238E27FC236}">
+                <a16:creationId xmlns:a16="http://schemas.microsoft.com/office/drawing/2014/main" id="{E103E43F-307A-3EA1-8D87-66B040CB0051}"/>
+              </a:ext>
+            </a:extLst>
+          </p:cNvPr>
+          <p:cNvCxnSpPr>
+            <a:cxnSpLocks/>
+          </p:cNvCxnSpPr>
+          <p:nvPr/>
+        </p:nvCxnSpPr>
+        <p:spPr>
+          <a:xfrm>
+            <a:off x="8628345" y="2675273"/>
+            <a:ext cx="0" cy="643824"/>
+          </a:xfrm>
+          <a:prstGeom prst="straightConnector1">
+            <a:avLst/>
+          </a:prstGeom>
+          <a:ln w="76200">
+            <a:tailEnd type="triangle"/>
+          </a:ln>
+        </p:spPr>
+        <p:style>
+          <a:lnRef idx="2">
+            <a:schemeClr val="accent2"/>
+          </a:lnRef>
+          <a:fillRef idx="0">
+            <a:schemeClr val="accent2"/>
+          </a:fillRef>
+          <a:effectRef idx="1">
+            <a:schemeClr val="accent2"/>
+          </a:effectRef>
+          <a:fontRef idx="minor">
+            <a:schemeClr val="tx1"/>
+          </a:fontRef>
+        </p:style>
+      </p:cxnSp>
+      <p:sp>
+        <p:nvSpPr>
+          <p:cNvPr id="11" name="TextBox 10">
+            <a:extLst>
+              <a:ext uri="{FF2B5EF4-FFF2-40B4-BE49-F238E27FC236}">
+                <a16:creationId xmlns:a16="http://schemas.microsoft.com/office/drawing/2014/main" id="{B281A007-6703-529A-8DAD-C4E56CE4D740}"/>
+              </a:ext>
+            </a:extLst>
+          </p:cNvPr>
+          <p:cNvSpPr txBox="1"/>
+          <p:nvPr/>
+        </p:nvSpPr>
+        <p:spPr>
+          <a:xfrm>
+            <a:off x="8173343" y="2120023"/>
+            <a:ext cx="910004" cy="584775"/>
+          </a:xfrm>
+          <a:prstGeom prst="rect">
+            <a:avLst/>
+          </a:prstGeom>
+          <a:noFill/>
+        </p:spPr>
+        <p:txBody>
+          <a:bodyPr wrap="square" rtlCol="0">
+            <a:spAutoFit/>
+          </a:bodyPr>
+          <a:lstStyle/>
+          <a:p>
+            <a:pPr algn="ctr"/>
+            <a:r>
+              <a:rPr lang="en-US" sz="3200" b="1" dirty="0">
+                <a:solidFill>
+                  <a:schemeClr val="accent2"/>
+                </a:solidFill>
+              </a:rPr>
+              <a:t>F</a:t>
+            </a:r>
+          </a:p>
+        </p:txBody>
+      </p:sp>
+      <p:sp>
+        <p:nvSpPr>
+          <p:cNvPr id="13" name="Rectangle 12">
+            <a:extLst>
+              <a:ext uri="{FF2B5EF4-FFF2-40B4-BE49-F238E27FC236}">
+                <a16:creationId xmlns:a16="http://schemas.microsoft.com/office/drawing/2014/main" id="{B42068AA-7F46-F989-592D-C532AC7B203C}"/>
+              </a:ext>
+            </a:extLst>
+          </p:cNvPr>
+          <p:cNvSpPr/>
+          <p:nvPr/>
+        </p:nvSpPr>
+        <p:spPr>
+          <a:xfrm>
+            <a:off x="10143934" y="3321194"/>
+            <a:ext cx="939638" cy="219808"/>
+          </a:xfrm>
+          <a:prstGeom prst="rect">
+            <a:avLst/>
+          </a:prstGeom>
+          <a:solidFill>
+            <a:schemeClr val="accent1">
+              <a:lumMod val="20000"/>
+              <a:lumOff val="80000"/>
+            </a:schemeClr>
+          </a:solidFill>
+        </p:spPr>
+        <p:style>
+          <a:lnRef idx="2">
+            <a:schemeClr val="accent1">
+              <a:shade val="15000"/>
+            </a:schemeClr>
+          </a:lnRef>
+          <a:fillRef idx="1">
+            <a:schemeClr val="accent1"/>
+          </a:fillRef>
+          <a:effectRef idx="0">
+            <a:schemeClr val="accent1"/>
+          </a:effectRef>
+          <a:fontRef idx="minor">
+            <a:schemeClr val="lt1"/>
+          </a:fontRef>
+        </p:style>
+        <p:txBody>
+          <a:bodyPr rtlCol="0" anchor="ctr"/>
+          <a:lstStyle/>
+          <a:p>
+            <a:pPr algn="ctr"/>
+            <a:endParaRPr lang="en-US"/>
+          </a:p>
+        </p:txBody>
+      </p:sp>
+      <p:grpSp>
+        <p:nvGrpSpPr>
+          <p:cNvPr id="2" name="Group 1">
+            <a:extLst>
+              <a:ext uri="{FF2B5EF4-FFF2-40B4-BE49-F238E27FC236}">
+                <a16:creationId xmlns:a16="http://schemas.microsoft.com/office/drawing/2014/main" id="{6C6E1DC7-3A5B-0310-AC98-5423E0E294AE}"/>
+              </a:ext>
+            </a:extLst>
+          </p:cNvPr>
+          <p:cNvGrpSpPr/>
+          <p:nvPr/>
+        </p:nvGrpSpPr>
+        <p:grpSpPr>
+          <a:xfrm>
+            <a:off x="10164543" y="3538904"/>
+            <a:ext cx="919025" cy="354013"/>
+            <a:chOff x="10079301" y="3820885"/>
+            <a:chExt cx="331494" cy="354013"/>
+          </a:xfrm>
+        </p:grpSpPr>
+        <p:cxnSp>
+          <p:nvCxnSpPr>
+            <p:cNvPr id="15" name="Straight Connector 14">
+              <a:extLst>
+                <a:ext uri="{FF2B5EF4-FFF2-40B4-BE49-F238E27FC236}">
+                  <a16:creationId xmlns:a16="http://schemas.microsoft.com/office/drawing/2014/main" id="{6E3DF720-7A5E-0E17-B57A-DE8D61C2A054}"/>
+                </a:ext>
+              </a:extLst>
+            </p:cNvPr>
+            <p:cNvCxnSpPr/>
+            <p:nvPr/>
+          </p:nvCxnSpPr>
+          <p:spPr>
+            <a:xfrm>
+              <a:off x="10079301" y="3820885"/>
+              <a:ext cx="0" cy="354013"/>
+            </a:xfrm>
+            <a:prstGeom prst="line">
+              <a:avLst/>
+            </a:prstGeom>
+            <a:ln w="12700"/>
+          </p:spPr>
+          <p:style>
+            <a:lnRef idx="1">
+              <a:schemeClr val="dk1"/>
+            </a:lnRef>
+            <a:fillRef idx="0">
+              <a:schemeClr val="dk1"/>
+            </a:fillRef>
+            <a:effectRef idx="0">
+              <a:schemeClr val="dk1"/>
+            </a:effectRef>
+            <a:fontRef idx="minor">
+              <a:schemeClr val="tx1"/>
+            </a:fontRef>
+          </p:style>
+        </p:cxnSp>
+        <p:cxnSp>
+          <p:nvCxnSpPr>
+            <p:cNvPr id="16" name="Straight Connector 15">
+              <a:extLst>
+                <a:ext uri="{FF2B5EF4-FFF2-40B4-BE49-F238E27FC236}">
+                  <a16:creationId xmlns:a16="http://schemas.microsoft.com/office/drawing/2014/main" id="{1C090660-B459-E15B-C359-4D1B045D7DAC}"/>
+                </a:ext>
+              </a:extLst>
+            </p:cNvPr>
+            <p:cNvCxnSpPr/>
+            <p:nvPr/>
+          </p:nvCxnSpPr>
+          <p:spPr>
+            <a:xfrm>
+              <a:off x="10410795" y="3820885"/>
+              <a:ext cx="0" cy="354013"/>
+            </a:xfrm>
+            <a:prstGeom prst="line">
+              <a:avLst/>
+            </a:prstGeom>
+            <a:ln w="12700"/>
+          </p:spPr>
+          <p:style>
+            <a:lnRef idx="1">
+              <a:schemeClr val="dk1"/>
+            </a:lnRef>
+            <a:fillRef idx="0">
+              <a:schemeClr val="dk1"/>
+            </a:fillRef>
+            <a:effectRef idx="0">
+              <a:schemeClr val="dk1"/>
+            </a:effectRef>
+            <a:fontRef idx="minor">
+              <a:schemeClr val="tx1"/>
+            </a:fontRef>
+          </p:style>
+        </p:cxnSp>
+        <p:cxnSp>
+          <p:nvCxnSpPr>
+            <p:cNvPr id="18" name="Straight Arrow Connector 17">
+              <a:extLst>
+                <a:ext uri="{FF2B5EF4-FFF2-40B4-BE49-F238E27FC236}">
+                  <a16:creationId xmlns:a16="http://schemas.microsoft.com/office/drawing/2014/main" id="{E265CD1F-3660-F851-CE3C-27A6EB1D5121}"/>
+                </a:ext>
+              </a:extLst>
+            </p:cNvPr>
+            <p:cNvCxnSpPr>
+              <a:cxnSpLocks/>
+            </p:cNvCxnSpPr>
+            <p:nvPr/>
+          </p:nvCxnSpPr>
+          <p:spPr>
+            <a:xfrm>
+              <a:off x="10079301" y="3999478"/>
+              <a:ext cx="331494" cy="0"/>
+            </a:xfrm>
+            <a:prstGeom prst="straightConnector1">
+              <a:avLst/>
+            </a:prstGeom>
+            <a:ln w="12700">
+              <a:headEnd type="triangle"/>
+              <a:tailEnd type="triangle"/>
+            </a:ln>
+          </p:spPr>
+          <p:style>
+            <a:lnRef idx="2">
+              <a:schemeClr val="dk1"/>
+            </a:lnRef>
+            <a:fillRef idx="0">
+              <a:schemeClr val="dk1"/>
+            </a:fillRef>
+            <a:effectRef idx="1">
+              <a:schemeClr val="dk1"/>
+            </a:effectRef>
+            <a:fontRef idx="minor">
+              <a:schemeClr val="tx1"/>
+            </a:fontRef>
+          </p:style>
+        </p:cxnSp>
+      </p:grpSp>
+      <p:sp>
+        <p:nvSpPr>
+          <p:cNvPr id="20" name="TextBox 19">
+            <a:extLst>
+              <a:ext uri="{FF2B5EF4-FFF2-40B4-BE49-F238E27FC236}">
+                <a16:creationId xmlns:a16="http://schemas.microsoft.com/office/drawing/2014/main" id="{54124AFD-DD0E-53E5-51AE-B3921991069F}"/>
+              </a:ext>
+            </a:extLst>
+          </p:cNvPr>
+          <p:cNvSpPr txBox="1"/>
+          <p:nvPr/>
+        </p:nvSpPr>
+        <p:spPr>
+          <a:xfrm>
+            <a:off x="10339909" y="3820884"/>
+            <a:ext cx="547687" cy="369332"/>
+          </a:xfrm>
+          <a:prstGeom prst="rect">
+            <a:avLst/>
+          </a:prstGeom>
+          <a:noFill/>
+        </p:spPr>
+        <p:txBody>
+          <a:bodyPr wrap="square" rtlCol="0">
+            <a:spAutoFit/>
+          </a:bodyPr>
+          <a:lstStyle/>
+          <a:p>
+            <a:pPr algn="ctr"/>
+            <a:r>
+              <a:rPr lang="en-US" dirty="0"/>
+              <a:t>w</a:t>
+            </a:r>
+          </a:p>
+        </p:txBody>
+      </p:sp>
+      <p:sp>
+        <p:nvSpPr>
+          <p:cNvPr id="21" name="TextBox 20">
+            <a:extLst>
+              <a:ext uri="{FF2B5EF4-FFF2-40B4-BE49-F238E27FC236}">
+                <a16:creationId xmlns:a16="http://schemas.microsoft.com/office/drawing/2014/main" id="{3AD9480B-637E-C3AA-A48B-AD05FCE7B4A9}"/>
+              </a:ext>
+            </a:extLst>
+          </p:cNvPr>
+          <p:cNvSpPr txBox="1"/>
+          <p:nvPr/>
+        </p:nvSpPr>
+        <p:spPr>
+          <a:xfrm>
+            <a:off x="9507654" y="3244333"/>
+            <a:ext cx="547687" cy="369332"/>
+          </a:xfrm>
+          <a:prstGeom prst="rect">
+            <a:avLst/>
+          </a:prstGeom>
+          <a:noFill/>
+        </p:spPr>
+        <p:txBody>
+          <a:bodyPr wrap="square" rtlCol="0">
+            <a:spAutoFit/>
+          </a:bodyPr>
+          <a:lstStyle/>
+          <a:p>
+            <a:pPr algn="ctr"/>
+            <a:r>
+              <a:rPr lang="en-US" dirty="0"/>
+              <a:t>d</a:t>
+            </a:r>
+          </a:p>
+        </p:txBody>
+      </p:sp>
+      <p:grpSp>
+        <p:nvGrpSpPr>
+          <p:cNvPr id="25" name="Group 24">
+            <a:extLst>
+              <a:ext uri="{FF2B5EF4-FFF2-40B4-BE49-F238E27FC236}">
+                <a16:creationId xmlns:a16="http://schemas.microsoft.com/office/drawing/2014/main" id="{E9AC4A5B-51A4-E5D0-4D9B-432FDFE3CF7C}"/>
+              </a:ext>
+            </a:extLst>
+          </p:cNvPr>
+          <p:cNvGrpSpPr/>
+          <p:nvPr/>
+        </p:nvGrpSpPr>
+        <p:grpSpPr>
+          <a:xfrm rot="16200000">
+            <a:off x="9877634" y="3251993"/>
+            <a:ext cx="219807" cy="354013"/>
+            <a:chOff x="10231701" y="3973285"/>
+            <a:chExt cx="331494" cy="354013"/>
+          </a:xfrm>
+        </p:grpSpPr>
+        <p:cxnSp>
+          <p:nvCxnSpPr>
+            <p:cNvPr id="22" name="Straight Connector 21">
+              <a:extLst>
+                <a:ext uri="{FF2B5EF4-FFF2-40B4-BE49-F238E27FC236}">
+                  <a16:creationId xmlns:a16="http://schemas.microsoft.com/office/drawing/2014/main" id="{F4E087FD-5044-4B2B-918B-A301D00F5EF4}"/>
+                </a:ext>
+              </a:extLst>
+            </p:cNvPr>
+            <p:cNvCxnSpPr/>
+            <p:nvPr/>
+          </p:nvCxnSpPr>
+          <p:spPr>
+            <a:xfrm>
+              <a:off x="10231701" y="3973285"/>
+              <a:ext cx="0" cy="354013"/>
+            </a:xfrm>
+            <a:prstGeom prst="line">
+              <a:avLst/>
+            </a:prstGeom>
+            <a:ln w="12700"/>
+          </p:spPr>
+          <p:style>
+            <a:lnRef idx="1">
+              <a:schemeClr val="dk1"/>
+            </a:lnRef>
+            <a:fillRef idx="0">
+              <a:schemeClr val="dk1"/>
+            </a:fillRef>
+            <a:effectRef idx="0">
+              <a:schemeClr val="dk1"/>
+            </a:effectRef>
+            <a:fontRef idx="minor">
+              <a:schemeClr val="tx1"/>
+            </a:fontRef>
+          </p:style>
+        </p:cxnSp>
+        <p:cxnSp>
+          <p:nvCxnSpPr>
+            <p:cNvPr id="23" name="Straight Connector 22">
+              <a:extLst>
+                <a:ext uri="{FF2B5EF4-FFF2-40B4-BE49-F238E27FC236}">
+                  <a16:creationId xmlns:a16="http://schemas.microsoft.com/office/drawing/2014/main" id="{A742F54A-1EF7-0A82-FA74-B103A146C70E}"/>
+                </a:ext>
+              </a:extLst>
+            </p:cNvPr>
+            <p:cNvCxnSpPr/>
+            <p:nvPr/>
+          </p:nvCxnSpPr>
+          <p:spPr>
+            <a:xfrm>
+              <a:off x="10563195" y="3973285"/>
+              <a:ext cx="0" cy="354013"/>
+            </a:xfrm>
+            <a:prstGeom prst="line">
+              <a:avLst/>
+            </a:prstGeom>
+            <a:ln w="12700"/>
+          </p:spPr>
+          <p:style>
+            <a:lnRef idx="1">
+              <a:schemeClr val="dk1"/>
+            </a:lnRef>
+            <a:fillRef idx="0">
+              <a:schemeClr val="dk1"/>
+            </a:fillRef>
+            <a:effectRef idx="0">
+              <a:schemeClr val="dk1"/>
+            </a:effectRef>
+            <a:fontRef idx="minor">
+              <a:schemeClr val="tx1"/>
+            </a:fontRef>
+          </p:style>
+        </p:cxnSp>
+        <p:cxnSp>
+          <p:nvCxnSpPr>
+            <p:cNvPr id="24" name="Straight Arrow Connector 23">
+              <a:extLst>
+                <a:ext uri="{FF2B5EF4-FFF2-40B4-BE49-F238E27FC236}">
+                  <a16:creationId xmlns:a16="http://schemas.microsoft.com/office/drawing/2014/main" id="{3A76583F-5A89-9F8B-2B3A-CB7CA7B2E066}"/>
+                </a:ext>
+              </a:extLst>
+            </p:cNvPr>
+            <p:cNvCxnSpPr>
+              <a:cxnSpLocks/>
+            </p:cNvCxnSpPr>
+            <p:nvPr/>
+          </p:nvCxnSpPr>
+          <p:spPr>
+            <a:xfrm>
+              <a:off x="10231701" y="4151878"/>
+              <a:ext cx="331494" cy="0"/>
+            </a:xfrm>
+            <a:prstGeom prst="straightConnector1">
+              <a:avLst/>
+            </a:prstGeom>
+            <a:ln w="12700">
+              <a:headEnd type="triangle"/>
+              <a:tailEnd type="triangle"/>
+            </a:ln>
+          </p:spPr>
+          <p:style>
+            <a:lnRef idx="2">
+              <a:schemeClr val="dk1"/>
+            </a:lnRef>
+            <a:fillRef idx="0">
+              <a:schemeClr val="dk1"/>
+            </a:fillRef>
+            <a:effectRef idx="1">
+              <a:schemeClr val="dk1"/>
+            </a:effectRef>
+            <a:fontRef idx="minor">
+              <a:schemeClr val="tx1"/>
+            </a:fontRef>
+          </p:style>
+        </p:cxnSp>
+      </p:grpSp>
+      <p:grpSp>
+        <p:nvGrpSpPr>
+          <p:cNvPr id="26" name="Group 25">
+            <a:extLst>
+              <a:ext uri="{FF2B5EF4-FFF2-40B4-BE49-F238E27FC236}">
+                <a16:creationId xmlns:a16="http://schemas.microsoft.com/office/drawing/2014/main" id="{4657D505-5E1F-9931-A4F8-329AF940A138}"/>
+              </a:ext>
+            </a:extLst>
+          </p:cNvPr>
+          <p:cNvGrpSpPr/>
+          <p:nvPr/>
+        </p:nvGrpSpPr>
+        <p:grpSpPr>
+          <a:xfrm>
+            <a:off x="3836538" y="3679559"/>
+            <a:ext cx="4791803" cy="354013"/>
+            <a:chOff x="10231701" y="3973285"/>
+            <a:chExt cx="331494" cy="354013"/>
+          </a:xfrm>
+        </p:grpSpPr>
+        <p:cxnSp>
+          <p:nvCxnSpPr>
+            <p:cNvPr id="27" name="Straight Connector 26">
+              <a:extLst>
+                <a:ext uri="{FF2B5EF4-FFF2-40B4-BE49-F238E27FC236}">
+                  <a16:creationId xmlns:a16="http://schemas.microsoft.com/office/drawing/2014/main" id="{763C18BB-8A03-8B3A-4E4B-5021479A0452}"/>
+                </a:ext>
+              </a:extLst>
+            </p:cNvPr>
+            <p:cNvCxnSpPr/>
+            <p:nvPr/>
+          </p:nvCxnSpPr>
+          <p:spPr>
+            <a:xfrm>
+              <a:off x="10231701" y="3973285"/>
+              <a:ext cx="0" cy="354013"/>
+            </a:xfrm>
+            <a:prstGeom prst="line">
+              <a:avLst/>
+            </a:prstGeom>
+            <a:ln w="12700"/>
+          </p:spPr>
+          <p:style>
+            <a:lnRef idx="1">
+              <a:schemeClr val="dk1"/>
+            </a:lnRef>
+            <a:fillRef idx="0">
+              <a:schemeClr val="dk1"/>
+            </a:fillRef>
+            <a:effectRef idx="0">
+              <a:schemeClr val="dk1"/>
+            </a:effectRef>
+            <a:fontRef idx="minor">
+              <a:schemeClr val="tx1"/>
+            </a:fontRef>
+          </p:style>
+        </p:cxnSp>
+        <p:cxnSp>
+          <p:nvCxnSpPr>
+            <p:cNvPr id="28" name="Straight Connector 27">
+              <a:extLst>
+                <a:ext uri="{FF2B5EF4-FFF2-40B4-BE49-F238E27FC236}">
+                  <a16:creationId xmlns:a16="http://schemas.microsoft.com/office/drawing/2014/main" id="{1A5166D9-6A66-6FBE-CC70-03567A4A23B2}"/>
+                </a:ext>
+              </a:extLst>
+            </p:cNvPr>
+            <p:cNvCxnSpPr/>
+            <p:nvPr/>
+          </p:nvCxnSpPr>
+          <p:spPr>
+            <a:xfrm>
+              <a:off x="10563195" y="3973285"/>
+              <a:ext cx="0" cy="354013"/>
+            </a:xfrm>
+            <a:prstGeom prst="line">
+              <a:avLst/>
+            </a:prstGeom>
+            <a:ln w="12700"/>
+          </p:spPr>
+          <p:style>
+            <a:lnRef idx="1">
+              <a:schemeClr val="dk1"/>
+            </a:lnRef>
+            <a:fillRef idx="0">
+              <a:schemeClr val="dk1"/>
+            </a:fillRef>
+            <a:effectRef idx="0">
+              <a:schemeClr val="dk1"/>
+            </a:effectRef>
+            <a:fontRef idx="minor">
+              <a:schemeClr val="tx1"/>
+            </a:fontRef>
+          </p:style>
+        </p:cxnSp>
+        <p:cxnSp>
+          <p:nvCxnSpPr>
+            <p:cNvPr id="29" name="Straight Arrow Connector 28">
+              <a:extLst>
+                <a:ext uri="{FF2B5EF4-FFF2-40B4-BE49-F238E27FC236}">
+                  <a16:creationId xmlns:a16="http://schemas.microsoft.com/office/drawing/2014/main" id="{7EB5F9C4-52EA-DA4E-F9B2-40464D9FD2E0}"/>
+                </a:ext>
+              </a:extLst>
+            </p:cNvPr>
+            <p:cNvCxnSpPr>
+              <a:cxnSpLocks/>
+            </p:cNvCxnSpPr>
+            <p:nvPr/>
+          </p:nvCxnSpPr>
+          <p:spPr>
+            <a:xfrm>
+              <a:off x="10231701" y="4151878"/>
+              <a:ext cx="331494" cy="0"/>
+            </a:xfrm>
+            <a:prstGeom prst="straightConnector1">
+              <a:avLst/>
+            </a:prstGeom>
+            <a:ln w="12700">
+              <a:headEnd type="triangle"/>
+              <a:tailEnd type="triangle"/>
+            </a:ln>
+          </p:spPr>
+          <p:style>
+            <a:lnRef idx="2">
+              <a:schemeClr val="dk1"/>
+            </a:lnRef>
+            <a:fillRef idx="0">
+              <a:schemeClr val="dk1"/>
+            </a:fillRef>
+            <a:effectRef idx="1">
+              <a:schemeClr val="dk1"/>
+            </a:effectRef>
+            <a:fontRef idx="minor">
+              <a:schemeClr val="tx1"/>
+            </a:fontRef>
+          </p:style>
+        </p:cxnSp>
+      </p:grpSp>
+      <p:sp>
+        <p:nvSpPr>
+          <p:cNvPr id="34" name="TextBox 33">
+            <a:extLst>
+              <a:ext uri="{FF2B5EF4-FFF2-40B4-BE49-F238E27FC236}">
+                <a16:creationId xmlns:a16="http://schemas.microsoft.com/office/drawing/2014/main" id="{141F9A39-76FC-84B0-89F7-B4E40BCB1DFA}"/>
+              </a:ext>
+            </a:extLst>
+          </p:cNvPr>
+          <p:cNvSpPr txBox="1"/>
+          <p:nvPr/>
+        </p:nvSpPr>
+        <p:spPr>
+          <a:xfrm>
+            <a:off x="5957621" y="3820884"/>
+            <a:ext cx="547687" cy="523220"/>
+          </a:xfrm>
+          <a:prstGeom prst="rect">
+            <a:avLst/>
+          </a:prstGeom>
+          <a:noFill/>
+        </p:spPr>
+        <p:txBody>
+          <a:bodyPr wrap="square" rtlCol="0">
+            <a:spAutoFit/>
+          </a:bodyPr>
+          <a:lstStyle/>
+          <a:p>
+            <a:pPr algn="ctr"/>
+            <a:r>
+              <a:rPr lang="en-US" sz="2800" dirty="0">
+                <a:latin typeface="Brush Script MT" panose="03060802040406070304" pitchFamily="66" charset="0"/>
+              </a:rPr>
+              <a:t>l</a:t>
+            </a:r>
+          </a:p>
+        </p:txBody>
+      </p:sp>
+    </p:spTree>
+    <p:extLst>
+      <p:ext uri="{BB962C8B-B14F-4D97-AF65-F5344CB8AC3E}">
+        <p14:creationId xmlns:p14="http://schemas.microsoft.com/office/powerpoint/2010/main" val="3836732347"/>
+      </p:ext>
+    </p:extLst>
+  </p:cSld>
+  <p:clrMapOvr>
+    <a:masterClrMapping/>
+  </p:clrMapOvr>
+</p:sld>
+</file>
+
+<file path=ppt/slides/slide3.xml><?xml version="1.0" encoding="utf-8"?>
 <p:sld xmlns:a="http://schemas.openxmlformats.org/drawingml/2006/main" xmlns:r="http://schemas.openxmlformats.org/officeDocument/2006/relationships" xmlns:p="http://schemas.openxmlformats.org/presentationml/2006/main">
   <p:cSld>
     <p:spTree>
